--- a/44_心理学/30_浥尘伙伴社团原创：中高考音乐减压心理训练/PPT制作素材/浥尘伙伴社团：中高考音乐减压心理训练.pptx
+++ b/44_心理学/30_浥尘伙伴社团原创：中高考音乐减压心理训练/PPT制作素材/浥尘伙伴社团：中高考音乐减压心理训练.pptx
@@ -229,7 +229,7 @@
           <a:p>
             <a:fld id="{613034E8-7B60-43FC-987C-A54D5D393751}" type="datetimeFigureOut">
               <a:rPr lang="zh-CN" altLang="en-US" smtClean="0"/>
-              <a:t>2025/12/8</a:t>
+              <a:t>2025/12/17</a:t>
             </a:fld>
             <a:endParaRPr lang="zh-CN" altLang="en-US"/>
           </a:p>
@@ -605,7 +605,7 @@
                 <a16:creationId xmlns:a16="http://schemas.microsoft.com/office/drawing/2014/main" id="{EA67E988-5919-57BB-C7DE-D3EAD38A3045}"/>
               </a:ext>
               <a:ext uri="{C183D7F6-B498-43B3-948B-1728B52AA6E4}">
-                <adec:decorative xmlns:adec="http://schemas.microsoft.com/office/drawing/2017/decorative" val="1"/>
+                <adec:decorative xmlns:adec="http://schemas.microsoft.com/office/drawing/2017/decorative" xmlns="" val="1"/>
               </a:ext>
             </a:extLst>
           </p:cNvPr>
@@ -861,7 +861,7 @@
           <a:p>
             <a:fld id="{E80C50CD-E178-4744-9B35-B2F624D6C5E9}" type="datetimeFigureOut">
               <a:rPr lang="en-US" smtClean="0"/>
-              <a:t>12/8/2025</a:t>
+              <a:t>12/17/2025</a:t>
             </a:fld>
             <a:endParaRPr lang="en-US"/>
           </a:p>
@@ -1059,7 +1059,7 @@
           <a:p>
             <a:fld id="{E80C50CD-E178-4744-9B35-B2F624D6C5E9}" type="datetimeFigureOut">
               <a:rPr lang="en-US" smtClean="0"/>
-              <a:t>12/8/2025</a:t>
+              <a:t>12/17/2025</a:t>
             </a:fld>
             <a:endParaRPr lang="en-US"/>
           </a:p>
@@ -1267,7 +1267,7 @@
           <a:p>
             <a:fld id="{E80C50CD-E178-4744-9B35-B2F624D6C5E9}" type="datetimeFigureOut">
               <a:rPr lang="en-US" smtClean="0"/>
-              <a:t>12/8/2025</a:t>
+              <a:t>12/17/2025</a:t>
             </a:fld>
             <a:endParaRPr lang="en-US"/>
           </a:p>
@@ -1547,7 +1547,7 @@
           <a:p>
             <a:fld id="{E80C50CD-E178-4744-9B35-B2F624D6C5E9}" type="datetimeFigureOut">
               <a:rPr lang="en-US" smtClean="0"/>
-              <a:t>12/8/2025</a:t>
+              <a:t>12/17/2025</a:t>
             </a:fld>
             <a:endParaRPr lang="en-US"/>
           </a:p>
@@ -1826,7 +1826,7 @@
           <a:p>
             <a:fld id="{E80C50CD-E178-4744-9B35-B2F624D6C5E9}" type="datetimeFigureOut">
               <a:rPr lang="en-US" smtClean="0"/>
-              <a:t>12/8/2025</a:t>
+              <a:t>12/17/2025</a:t>
             </a:fld>
             <a:endParaRPr lang="en-US"/>
           </a:p>
@@ -2143,7 +2143,7 @@
           <a:p>
             <a:fld id="{E80C50CD-E178-4744-9B35-B2F624D6C5E9}" type="datetimeFigureOut">
               <a:rPr lang="en-US" smtClean="0"/>
-              <a:t>12/8/2025</a:t>
+              <a:t>12/17/2025</a:t>
             </a:fld>
             <a:endParaRPr lang="en-US"/>
           </a:p>
@@ -2559,7 +2559,7 @@
           <a:p>
             <a:fld id="{E80C50CD-E178-4744-9B35-B2F624D6C5E9}" type="datetimeFigureOut">
               <a:rPr lang="en-US" smtClean="0"/>
-              <a:t>12/8/2025</a:t>
+              <a:t>12/17/2025</a:t>
             </a:fld>
             <a:endParaRPr lang="en-US"/>
           </a:p>
@@ -2700,7 +2700,7 @@
           <a:p>
             <a:fld id="{E80C50CD-E178-4744-9B35-B2F624D6C5E9}" type="datetimeFigureOut">
               <a:rPr lang="en-US" smtClean="0"/>
-              <a:t>12/8/2025</a:t>
+              <a:t>12/17/2025</a:t>
             </a:fld>
             <a:endParaRPr lang="en-US"/>
           </a:p>
@@ -2813,7 +2813,7 @@
           <a:p>
             <a:fld id="{E80C50CD-E178-4744-9B35-B2F624D6C5E9}" type="datetimeFigureOut">
               <a:rPr lang="en-US" smtClean="0"/>
-              <a:t>12/8/2025</a:t>
+              <a:t>12/17/2025</a:t>
             </a:fld>
             <a:endParaRPr lang="en-US"/>
           </a:p>
@@ -3130,7 +3130,7 @@
           <a:p>
             <a:fld id="{E80C50CD-E178-4744-9B35-B2F624D6C5E9}" type="datetimeFigureOut">
               <a:rPr lang="en-US" smtClean="0"/>
-              <a:t>12/8/2025</a:t>
+              <a:t>12/17/2025</a:t>
             </a:fld>
             <a:endParaRPr lang="en-US"/>
           </a:p>
@@ -3422,7 +3422,7 @@
           <a:p>
             <a:fld id="{E80C50CD-E178-4744-9B35-B2F624D6C5E9}" type="datetimeFigureOut">
               <a:rPr lang="en-US" smtClean="0"/>
-              <a:t>12/8/2025</a:t>
+              <a:t>12/17/2025</a:t>
             </a:fld>
             <a:endParaRPr lang="en-US"/>
           </a:p>
@@ -3658,7 +3658,7 @@
             <a:fld id="{E80C50CD-E178-4744-9B35-B2F624D6C5E9}" type="datetimeFigureOut">
               <a:rPr lang="en-US" smtClean="0"/>
               <a:pPr/>
-              <a:t>12/8/2025</a:t>
+              <a:t>12/17/2025</a:t>
             </a:fld>
             <a:endParaRPr lang="en-US"/>
           </a:p>
@@ -3759,7 +3759,7 @@
                 <a16:creationId xmlns:a16="http://schemas.microsoft.com/office/drawing/2014/main" id="{774A975B-A886-5202-0489-6965514A0D14}"/>
               </a:ext>
               <a:ext uri="{C183D7F6-B498-43B3-948B-1728B52AA6E4}">
-                <adec:decorative xmlns:adec="http://schemas.microsoft.com/office/drawing/2017/decorative" val="1"/>
+                <adec:decorative xmlns:adec="http://schemas.microsoft.com/office/drawing/2017/decorative" xmlns="" val="1"/>
               </a:ext>
             </a:extLst>
           </p:cNvPr>
@@ -4188,7 +4188,7 @@
                 <a16:creationId xmlns:a16="http://schemas.microsoft.com/office/drawing/2014/main" id="{0EECA69B-4C2A-7F31-8019-E90DB3BD49CB}"/>
               </a:ext>
               <a:ext uri="{C183D7F6-B498-43B3-948B-1728B52AA6E4}">
-                <adec:decorative xmlns:adec="http://schemas.microsoft.com/office/drawing/2017/decorative" val="1"/>
+                <adec:decorative xmlns:adec="http://schemas.microsoft.com/office/drawing/2017/decorative" xmlns="" val="1"/>
               </a:ext>
             </a:extLst>
           </p:cNvPr>
@@ -4327,7 +4327,7 @@
                 <a16:creationId xmlns:a16="http://schemas.microsoft.com/office/drawing/2014/main" id="{857DEAC1-B3AA-6569-0A44-A191DF2F3C67}"/>
               </a:ext>
               <a:ext uri="{C183D7F6-B498-43B3-948B-1728B52AA6E4}">
-                <adec:decorative xmlns:adec="http://schemas.microsoft.com/office/drawing/2017/decorative" val="1"/>
+                <adec:decorative xmlns:adec="http://schemas.microsoft.com/office/drawing/2017/decorative" xmlns="" val="1"/>
               </a:ext>
             </a:extLst>
           </p:cNvPr>
@@ -6544,7 +6544,13 @@
               <a:rPr lang="zh-CN" altLang="en-US" sz="1800" dirty="0">
                 <a:latin typeface="+mn-ea"/>
               </a:rPr>
-              <a:t>共情：前行下降至内窝</a:t>
+              <a:t>共情：前行下降</a:t>
+            </a:r>
+            <a:r>
+              <a:rPr lang="zh-CN" altLang="en-US" sz="1800" dirty="0">
+                <a:latin typeface="+mn-ea"/>
+              </a:rPr>
+              <a:t>至心窝</a:t>
             </a:r>
             <a:endParaRPr lang="en-US" altLang="zh-CN" sz="1800" dirty="0">
               <a:latin typeface="+mn-ea"/>
@@ -10032,7 +10038,25 @@
               <a:rPr lang="zh-CN" altLang="en-US" sz="1800" dirty="0">
                 <a:latin typeface="+mn-ea"/>
               </a:rPr>
-              <a:t>我们会让来访者做丙俱音乐治疗里面的经典技术，音乐眼动和音乐呼吸技术。</a:t>
+              <a:t>我们会让</a:t>
+            </a:r>
+            <a:r>
+              <a:rPr lang="zh-CN" altLang="en-US" sz="1800">
+                <a:latin typeface="+mn-ea"/>
+              </a:rPr>
+              <a:t>来访者</a:t>
+            </a:r>
+            <a:r>
+              <a:rPr lang="zh-CN" altLang="en-US" sz="1800" smtClean="0">
+                <a:latin typeface="+mn-ea"/>
+              </a:rPr>
+              <a:t>做两个音乐</a:t>
+            </a:r>
+            <a:r>
+              <a:rPr lang="zh-CN" altLang="en-US" sz="1800" dirty="0">
+                <a:latin typeface="+mn-ea"/>
+              </a:rPr>
+              <a:t>治疗里面的经典技术，音乐眼动和音乐呼吸技术。</a:t>
             </a:r>
           </a:p>
           <a:p>
